--- a/docs/presentation/Маршрут_защита_концепции.pptx
+++ b/docs/presentation/Маршрут_защита_концепции.pptx
@@ -113,20 +113,20 @@
   <p:extLst>
     <p:ext uri="{521415D9-36F7-43E2-AB2F-B90AF26B5E84}">
       <p14:sectionLst xmlns:p14="http://schemas.microsoft.com/office/powerpoint/2010/main">
-        <p14:section name="Тема" id="{8b4218ee-2c19-c239-f3be-ea39c572cf0b}">
+        <p14:section name="Тема" id="{cc9e046d-3d58-86c2-ffa2-3aec92699af2}">
           <p14:sldIdLst>
             <p14:sldId id="256"/>
             <p14:sldId id="257"/>
             <p14:sldId id="258"/>
           </p14:sldIdLst>
         </p14:section>
-        <p14:section name="Стек и архитектура" id="{1ff89a62-1703-b02f-24cf-26192b65a308}">
+        <p14:section name="Стек и архитектура" id="{7fb72313-0f6c-af6b-ad81-5d401a31d9d6}">
           <p14:sldIdLst>
             <p14:sldId id="259"/>
             <p14:sldId id="260"/>
           </p14:sldIdLst>
         </p14:section>
-        <p14:section name="UI/UX и roadmap" id="{617150c8-6f41-648e-3667-4846fb0b3a5c}">
+        <p14:section name="UI/UX и roadmap" id="{750fc151-b60a-759a-7ddd-ceee55efccb7}">
           <p14:sldIdLst>
             <p14:sldId id="261"/>
             <p14:sldId id="262"/>
@@ -1693,6 +1693,78 @@
         </p:nvSpPr>
         <p:spPr>
           <a:xfrm>
+            <a:off x="1783080" y="640080"/>
+            <a:ext cx="5303520" cy="914400"/>
+          </a:xfrm>
+          <a:prstGeom prst="rect">
+            <a:avLst/>
+          </a:prstGeom>
+          <a:noFill/>
+          <a:ln/>
+        </p:spPr>
+        <p:txBody>
+          <a:bodyPr wrap="square" lIns="0" tIns="0" rIns="0" bIns="0" rtlCol="0" anchor="ctr"/>
+          <a:lstStyle/>
+          <a:p>
+            <a:pPr indent="0" marL="0">
+              <a:buNone/>
+            </a:pPr>
+            <a:r>
+              <a:rPr lang="en-US" sz="1800" b="1" dirty="0">
+                <a:solidFill>
+                  <a:schemeClr val="bg1"/>
+                </a:solidFill>
+              </a:rPr>
+              <a:t>Колледж Astana IT University</a:t>
+            </a:r>
+            <a:endParaRPr lang="en-US" sz="1800" dirty="0"/>
+          </a:p>
+        </p:txBody>
+      </p:sp>
+      <p:sp>
+        <p:nvSpPr>
+          <p:cNvPr id="4" name="Text 1"/>
+          <p:cNvSpPr txBox="1"/>
+          <p:nvPr/>
+        </p:nvSpPr>
+        <p:spPr>
+          <a:xfrm>
+            <a:off x="640080" y="6035040"/>
+            <a:ext cx="6766560" cy="320040"/>
+          </a:xfrm>
+          <a:prstGeom prst="rect">
+            <a:avLst/>
+          </a:prstGeom>
+          <a:noFill/>
+          <a:ln/>
+        </p:spPr>
+        <p:txBody>
+          <a:bodyPr wrap="square" lIns="0" tIns="0" rIns="0" bIns="0" rtlCol="0" anchor="t"/>
+          <a:lstStyle/>
+          <a:p>
+            <a:pPr indent="0" marL="0">
+              <a:buNone/>
+            </a:pPr>
+            <a:r>
+              <a:rPr lang="en-US" sz="1400" dirty="0">
+                <a:solidFill>
+                  <a:schemeClr val="accent5"/>
+                </a:solidFill>
+              </a:rPr>
+              <a:t>Астана 2026</a:t>
+            </a:r>
+            <a:endParaRPr lang="en-US" sz="1400" dirty="0"/>
+          </a:p>
+        </p:txBody>
+      </p:sp>
+      <p:sp>
+        <p:nvSpPr>
+          <p:cNvPr id="5" name="Text 2"/>
+          <p:cNvSpPr txBox="1"/>
+          <p:nvPr/>
+        </p:nvSpPr>
+        <p:spPr>
+          <a:xfrm>
             <a:off x="640080" y="1828800"/>
             <a:ext cx="6766560" cy="365760"/>
           </a:xfrm>
@@ -1723,7 +1795,7 @@
       </p:sp>
       <p:sp>
         <p:nvSpPr>
-          <p:cNvPr id="4" name="Text 1"/>
+          <p:cNvPr id="6" name="Text 3"/>
           <p:cNvSpPr txBox="1"/>
           <p:nvPr/>
         </p:nvSpPr>
@@ -1762,7 +1834,7 @@
       </p:sp>
       <p:sp>
         <p:nvSpPr>
-          <p:cNvPr id="5" name="Text 2"/>
+          <p:cNvPr id="7" name="Text 4"/>
           <p:cNvSpPr txBox="1"/>
           <p:nvPr/>
         </p:nvSpPr>
@@ -1798,7 +1870,7 @@
       </p:sp>
       <p:sp>
         <p:nvSpPr>
-          <p:cNvPr id="6" name="Text 3"/>
+          <p:cNvPr id="8" name="Text 5"/>
           <p:cNvSpPr txBox="1"/>
           <p:nvPr/>
         </p:nvSpPr>
@@ -1834,7 +1906,7 @@
       </p:sp>
       <p:sp>
         <p:nvSpPr>
-          <p:cNvPr id="7" name="Text 4"/>
+          <p:cNvPr id="9" name="Text 6"/>
           <p:cNvSpPr txBox="1"/>
           <p:nvPr/>
         </p:nvSpPr>
@@ -1918,7 +1990,7 @@
       </p:sp>
       <p:pic>
         <p:nvPicPr>
-          <p:cNvPr id="8" name="Скриншот 05_home" descr="05_home">    </p:cNvPr>
+          <p:cNvPr id="10" name="Скриншот 05_home" descr="05_home">    </p:cNvPr>
           <p:cNvPicPr>
             <a:picLocks noChangeAspect="1"/>
           </p:cNvPicPr>
@@ -1942,7 +2014,7 @@
       </p:pic>
       <p:pic>
         <p:nvPicPr>
-          <p:cNvPr id="9" name="Скриншот 19_preview" descr="19_preview">    </p:cNvPr>
+          <p:cNvPr id="11" name="Скриншот 19_preview" descr="19_preview">    </p:cNvPr>
           <p:cNvPicPr>
             <a:picLocks noChangeAspect="1"/>
           </p:cNvPicPr>

--- a/docs/presentation/Маршрут_защита_концепции.pptx
+++ b/docs/presentation/Маршрут_защита_концепции.pptx
@@ -113,20 +113,20 @@
   <p:extLst>
     <p:ext uri="{521415D9-36F7-43E2-AB2F-B90AF26B5E84}">
       <p14:sectionLst xmlns:p14="http://schemas.microsoft.com/office/powerpoint/2010/main">
-        <p14:section name="Тема" id="{cc9e046d-3d58-86c2-ffa2-3aec92699af2}">
+        <p14:section name="Тема" id="{6f4a99a9-42ce-edc6-f98c-90a0ee001fa9}">
           <p14:sldIdLst>
             <p14:sldId id="256"/>
             <p14:sldId id="257"/>
             <p14:sldId id="258"/>
           </p14:sldIdLst>
         </p14:section>
-        <p14:section name="Стек и архитектура" id="{7fb72313-0f6c-af6b-ad81-5d401a31d9d6}">
+        <p14:section name="Стек и архитектура" id="{416ce785-ace7-5f01-326b-310b64399226}">
           <p14:sldIdLst>
             <p14:sldId id="259"/>
             <p14:sldId id="260"/>
           </p14:sldIdLst>
         </p14:section>
-        <p14:section name="UI/UX и roadmap" id="{750fc151-b60a-759a-7ddd-ceee55efccb7}">
+        <p14:section name="UI/UX и roadmap" id="{80f95a5a-4f72-8b39-fa9b-11ce703821ae}">
           <p14:sldIdLst>
             <p14:sldId id="261"/>
             <p14:sldId id="262"/>
@@ -712,7 +712,7 @@
           <a:p>
             <a:r>
               <a:rPr lang="en-US" dirty="0"/>
-              <a:t>Я сравнил приложение с аналогами. roadmap.sh показывает схемы изучения технологий, но схема одна для всех и не превращается в расписание. Duolingo хорошо мотивирует ежедневной целью, но план задаёт сам сервис. Курсы на Stepik и Coursera идут в своём темпе. Планировщики вроде Notion или Todoist требуют расписывать всё вручную. «Маршрут» объединяет граф тем, учёт уровня через тест, расписание под ваше время и автоматическую перестройку, и работает без интернета. (Перед защитой сверить таблицу с актуальными версиями сервисов.)</a:t>
+              <a:t>Я сравнил приложение с аналогами. roadmap.sh показывает схемы изучения технологий, но схема одна для всех и не превращается в расписание. Duolingo хорошо мотивирует ежедневной целью, но план задаёт сам сервис. Курсы на Stepik и Coursera идут в своём темпе. Планировщики вроде Notion или Todoist требуют расписывать всё вручную. «Маршрут» объединяет граф тем, учёт уровня через тест, расписание под ваше время и автоматическую перестройку, а данные хранит на собственном сервере API без облачных сервисов. (Перед защитой сверить таблицу с актуальными версиями сервисов.)</a:t>
             </a:r>
             <a:endParaRPr lang="en-US" dirty="0"/>
           </a:p>
@@ -800,7 +800,7 @@
           <a:p>
             <a:r>
               <a:rPr lang="en-US" dirty="0"/>
-              <a:t>Архитектура построена по Clean Architecture и разделена на три слоя. Domain написан на чистом Dart и не знает о Flutter: здесь сущности и главный алгоритм, поэтому его легко тестировать. Data отвечает за хранение: SQLite через drift, каталог тем в JSON и настройки. Presentation — экраны и провайдеры Riverpod. Riverpod выбран вместо BLoC, потому что требует меньше шаблонного кода, и вместо Provider, потому что не зависит от BuildContext и легко подменяется в тестах. drift выбран, потому что данные связаны: у пользователя планы, у плана занятия. Hive хранит пары ключ-значение без связей, а Firebase требует облака и интернета. go_router с redirect не пускает на закрытые экраны без входа.</a:t>
+              <a:t>Система состоит из двух программ. Приложение на Flutter построено по Clean Architecture: экраны берут данные у провайдеров Riverpod, провайдеры вызывают PlanService и алгоритм в слое domain на чистом Dart, а данные получают через репозитории API. Все запросы идут через общий клиент ApiClient: он добавляет токен, ждёт ответ не дольше 10 секунд и превращает ошибки в понятные сообщения. Сервер API тоже написан на Dart, на библиотеке shelf. Он выбирает обработчик по адресу, проверяет токен, данные и то, что запись принадлежит этому пользователю, и только после этого работает с базой SQLite через drift. Приложение к базе напрямую не обращается: получение, добавление, изменение и удаление идут только через API. Riverpod выбран вместо BLoC и Provider: меньше шаблонного кода, легко подменять зависимости в тестах. Свой сервер вместо Firebase — нет облака, ключей и внешних сервисов, а данные связаны и требуют SQL. Слоистая архитектура себя оправдала: при переходе на сервер заменились только репозитории, алгоритм и экраны остались прежними.</a:t>
             </a:r>
             <a:endParaRPr lang="en-US" dirty="0"/>
           </a:p>
@@ -1064,7 +1064,7 @@
           <a:p>
             <a:r>
               <a:rPr lang="en-US" dirty="0"/>
-              <a:t>Работа разбита на этапы. Сегодня защищается концепция: тема, архитектура и прототип. В первом семестре реализуется обязательный сценарий — заставка, регистрация, вход, главная, навигация, профиль, выход — и генератор плана. Во втором семестре — перепланирование, Pomodoro, несколько планов, CRUD, поиск, уведомления и графики, затем тесты и релизный APK. Итог: «Маршрут» превращает хаотичное самообучение в понятный план по дням, работает офлайн и запускается одной командой. Спасибо за внимание, готов ответить на вопросы.</a:t>
+              <a:t>Работа разбита на этапы. Сегодня защищается концепция: тема, архитектура и прототип. В первом семестре реализуется обязательный сценарий — заставка, регистрация, вход, главная, навигация, профиль, выход — и генератор плана. Во втором семестре — сервер API, через который приложение получает и изменяет все данные, перепланирование, Pomodoro, несколько планов, поиск, уведомления и графики, затем тесты и сборки для Android и iPhone. Итог: «Маршрут» превращает хаотичное самообучение в понятный план по дням, а данные хранит на собственном сервере без облачных сервисов. Спасибо за внимание, готов ответить на вопросы.</a:t>
             </a:r>
             <a:endParaRPr lang="en-US" dirty="0"/>
           </a:p>
@@ -4962,7 +4962,7 @@
                             <a:schemeClr val="tx1"/>
                           </a:solidFill>
                         </a:rPr>
-                        <a:t>Работа без интернета</a:t>
+                        <a:t>Где хранятся данные</a:t>
                       </a:r>
                       <a:endParaRPr lang="en-US" sz="1400" dirty="0"/>
                     </a:p>
@@ -5023,7 +5023,7 @@
                             <a:schemeClr val="tx1"/>
                           </a:solidFill>
                         </a:rPr>
-                        <a:t>нет</a:t>
+                        <a:t>облако сервиса</a:t>
                       </a:r>
                       <a:endParaRPr lang="en-US" sz="1400" dirty="0"/>
                     </a:p>
@@ -5084,7 +5084,7 @@
                             <a:schemeClr val="tx1"/>
                           </a:solidFill>
                         </a:rPr>
-                        <a:t>нет</a:t>
+                        <a:t>облако сервиса</a:t>
                       </a:r>
                       <a:endParaRPr lang="en-US" sz="1400" dirty="0"/>
                     </a:p>
@@ -5145,7 +5145,7 @@
                             <a:schemeClr val="tx1"/>
                           </a:solidFill>
                         </a:rPr>
-                        <a:t>нет</a:t>
+                        <a:t>облако сервиса</a:t>
                       </a:r>
                       <a:endParaRPr lang="en-US" sz="1400" dirty="0"/>
                     </a:p>
@@ -5206,7 +5206,7 @@
                             <a:schemeClr val="tx1"/>
                           </a:solidFill>
                         </a:rPr>
-                        <a:t>частично</a:t>
+                        <a:t>облако сервиса</a:t>
                       </a:r>
                       <a:endParaRPr lang="en-US" sz="1400" dirty="0"/>
                     </a:p>
@@ -5267,7 +5267,7 @@
                             <a:schemeClr val="tx2"/>
                           </a:solidFill>
                         </a:rPr>
-                        <a:t>да, всё локально</a:t>
+                        <a:t>свой сервер API</a:t>
                       </a:r>
                       <a:endParaRPr lang="en-US" sz="1400" dirty="0"/>
                     </a:p>
@@ -5526,7 +5526,7 @@
                   <a:schemeClr val="tx2"/>
                 </a:solidFill>
               </a:rPr>
-              <a:t>Архитектура: три слоя Clean Architecture</a:t>
+              <a:t>Архитектура: приложение и сервер API</a:t>
             </a:r>
             <a:endParaRPr lang="en-US" sz="3200" dirty="0"/>
           </a:p>
@@ -5534,18 +5534,18 @@
       </p:sp>
       <p:sp>
         <p:nvSpPr>
-          <p:cNvPr id="3" name="Слой Presentation"/>
+          <p:cNvPr id="3" name="Приложение"/>
           <p:cNvSpPr/>
           <p:nvPr/>
         </p:nvSpPr>
         <p:spPr>
           <a:xfrm>
-            <a:off x="548640" y="1371600"/>
-            <a:ext cx="5120640" cy="1280160"/>
+            <a:off x="548640" y="1280160"/>
+            <a:ext cx="4572000" cy="3154680"/>
           </a:xfrm>
           <a:prstGeom prst="roundRect">
             <a:avLst>
-              <a:gd name="adj" fmla="val 8571"/>
+              <a:gd name="adj" fmla="val 3478"/>
             </a:avLst>
           </a:prstGeom>
           <a:solidFill>
@@ -5562,8 +5562,8 @@
         </p:nvSpPr>
         <p:spPr>
           <a:xfrm>
-            <a:off x="822960" y="1554480"/>
-            <a:ext cx="4572000" cy="365760"/>
+            <a:off x="777240" y="1389888"/>
+            <a:ext cx="4206240" cy="365760"/>
           </a:xfrm>
           <a:prstGeom prst="rect">
             <a:avLst/>
@@ -5579,67 +5579,194 @@
               <a:buNone/>
             </a:pPr>
             <a:r>
-              <a:rPr lang="en-US" sz="1900" b="1" dirty="0">
+              <a:rPr lang="en-US" sz="1700" b="1" dirty="0">
                 <a:solidFill>
                   <a:schemeClr val="tx2"/>
                 </a:solidFill>
               </a:rPr>
-              <a:t>Presentation</a:t>
-            </a:r>
-            <a:endParaRPr lang="en-US" sz="1900" dirty="0"/>
-          </a:p>
-        </p:txBody>
-      </p:sp>
-      <p:sp>
-        <p:nvSpPr>
-          <p:cNvPr id="5" name="Text 3"/>
-          <p:cNvSpPr txBox="1"/>
-          <p:nvPr/>
-        </p:nvSpPr>
-        <p:spPr>
-          <a:xfrm>
-            <a:off x="822960" y="1965960"/>
-            <a:ext cx="4663440" cy="640080"/>
-          </a:xfrm>
-          <a:prstGeom prst="rect">
-            <a:avLst/>
-          </a:prstGeom>
-          <a:noFill/>
-          <a:ln/>
-        </p:spPr>
-        <p:txBody>
-          <a:bodyPr wrap="square" lIns="0" tIns="0" rIns="0" bIns="0" rtlCol="0" anchor="t"/>
-          <a:lstStyle/>
-          <a:p>
+              <a:t>Приложение</a:t>
+            </a:r>
             <a:pPr indent="0" marL="0">
               <a:buNone/>
             </a:pPr>
             <a:r>
-              <a:rPr lang="en-US" sz="1400" dirty="0">
-                <a:solidFill>
-                  <a:schemeClr val="tx1"/>
-                </a:solidFill>
-              </a:rPr>
-              <a:t>Экраны Material 3, провайдеры Riverpod, go_router с redirect</a:t>
-            </a:r>
-            <a:endParaRPr lang="en-US" sz="1400" dirty="0"/>
-          </a:p>
-        </p:txBody>
-      </p:sp>
-      <p:sp>
-        <p:nvSpPr>
-          <p:cNvPr id="6" name="Слой Domain · чистый Dart"/>
+              <a:rPr lang="en-US" sz="1300" dirty="0">
+                <a:solidFill>
+                  <a:schemeClr val="accent6"/>
+                </a:solidFill>
+              </a:rPr>
+              <a:t>  Flutter, телефон</a:t>
+            </a:r>
+            <a:endParaRPr lang="en-US" sz="1700" dirty="0"/>
+          </a:p>
+        </p:txBody>
+      </p:sp>
+      <p:sp>
+        <p:nvSpPr>
+          <p:cNvPr id="5" name="Метка Экраны Material 3"/>
           <p:cNvSpPr/>
           <p:nvPr/>
         </p:nvSpPr>
         <p:spPr>
           <a:xfrm>
-            <a:off x="548640" y="2971800"/>
-            <a:ext cx="5120640" cy="1280160"/>
+            <a:off x="777240" y="1847088"/>
+            <a:ext cx="4114800" cy="402336"/>
           </a:xfrm>
           <a:prstGeom prst="roundRect">
             <a:avLst>
-              <a:gd name="adj" fmla="val 8571"/>
+              <a:gd name="adj" fmla="val 45455"/>
+            </a:avLst>
+          </a:prstGeom>
+          <a:solidFill>
+            <a:schemeClr val="bg1"/>
+          </a:solidFill>
+          <a:ln/>
+        </p:spPr>
+        <p:txBody>
+          <a:bodyPr wrap="square" lIns="635" tIns="635" rIns="635" bIns="635" rtlCol="0" anchor="ctr"/>
+          <a:lstStyle/>
+          <a:p>
+            <a:pPr algn="ctr" indent="0" marL="0">
+              <a:buNone/>
+            </a:pPr>
+            <a:r>
+              <a:rPr lang="en-US" sz="1300" b="1" dirty="0">
+                <a:solidFill>
+                  <a:schemeClr val="tx2"/>
+                </a:solidFill>
+              </a:rPr>
+              <a:t>Экраны Material 3</a:t>
+            </a:r>
+            <a:endParaRPr lang="en-US" sz="1300" dirty="0"/>
+          </a:p>
+        </p:txBody>
+      </p:sp>
+      <p:sp>
+        <p:nvSpPr>
+          <p:cNvPr id="6" name="Text 4"/>
+          <p:cNvSpPr txBox="1"/>
+          <p:nvPr/>
+        </p:nvSpPr>
+        <p:spPr>
+          <a:xfrm>
+            <a:off x="2651760" y="2231136"/>
+            <a:ext cx="365760" cy="128016"/>
+          </a:xfrm>
+          <a:prstGeom prst="rect">
+            <a:avLst/>
+          </a:prstGeom>
+          <a:noFill/>
+          <a:ln/>
+        </p:spPr>
+        <p:txBody>
+          <a:bodyPr wrap="square" lIns="0" tIns="0" rIns="0" bIns="0" rtlCol="0" anchor="ctr"/>
+          <a:lstStyle/>
+          <a:p>
+            <a:pPr algn="ctr" indent="0" marL="0">
+              <a:buNone/>
+            </a:pPr>
+            <a:r>
+              <a:rPr lang="en-US" sz="900" dirty="0">
+                <a:solidFill>
+                  <a:schemeClr val="accent1"/>
+                </a:solidFill>
+              </a:rPr>
+              <a:t>↓</a:t>
+            </a:r>
+            <a:endParaRPr lang="en-US" sz="900" dirty="0"/>
+          </a:p>
+        </p:txBody>
+      </p:sp>
+      <p:sp>
+        <p:nvSpPr>
+          <p:cNvPr id="7" name="Метка Провайдеры Riverpod"/>
+          <p:cNvSpPr/>
+          <p:nvPr/>
+        </p:nvSpPr>
+        <p:spPr>
+          <a:xfrm>
+            <a:off x="777240" y="2350008"/>
+            <a:ext cx="4114800" cy="402336"/>
+          </a:xfrm>
+          <a:prstGeom prst="roundRect">
+            <a:avLst>
+              <a:gd name="adj" fmla="val 45455"/>
+            </a:avLst>
+          </a:prstGeom>
+          <a:solidFill>
+            <a:schemeClr val="bg1"/>
+          </a:solidFill>
+          <a:ln/>
+        </p:spPr>
+        <p:txBody>
+          <a:bodyPr wrap="square" lIns="635" tIns="635" rIns="635" bIns="635" rtlCol="0" anchor="ctr"/>
+          <a:lstStyle/>
+          <a:p>
+            <a:pPr algn="ctr" indent="0" marL="0">
+              <a:buNone/>
+            </a:pPr>
+            <a:r>
+              <a:rPr lang="en-US" sz="1300" b="1" dirty="0">
+                <a:solidFill>
+                  <a:schemeClr val="tx2"/>
+                </a:solidFill>
+              </a:rPr>
+              <a:t>Провайдеры Riverpod</a:t>
+            </a:r>
+            <a:endParaRPr lang="en-US" sz="1300" dirty="0"/>
+          </a:p>
+        </p:txBody>
+      </p:sp>
+      <p:sp>
+        <p:nvSpPr>
+          <p:cNvPr id="8" name="Text 6"/>
+          <p:cNvSpPr txBox="1"/>
+          <p:nvPr/>
+        </p:nvSpPr>
+        <p:spPr>
+          <a:xfrm>
+            <a:off x="2651760" y="2734056"/>
+            <a:ext cx="365760" cy="128016"/>
+          </a:xfrm>
+          <a:prstGeom prst="rect">
+            <a:avLst/>
+          </a:prstGeom>
+          <a:noFill/>
+          <a:ln/>
+        </p:spPr>
+        <p:txBody>
+          <a:bodyPr wrap="square" lIns="0" tIns="0" rIns="0" bIns="0" rtlCol="0" anchor="ctr"/>
+          <a:lstStyle/>
+          <a:p>
+            <a:pPr algn="ctr" indent="0" marL="0">
+              <a:buNone/>
+            </a:pPr>
+            <a:r>
+              <a:rPr lang="en-US" sz="900" dirty="0">
+                <a:solidFill>
+                  <a:schemeClr val="accent1"/>
+                </a:solidFill>
+              </a:rPr>
+              <a:t>↓</a:t>
+            </a:r>
+            <a:endParaRPr lang="en-US" sz="900" dirty="0"/>
+          </a:p>
+        </p:txBody>
+      </p:sp>
+      <p:sp>
+        <p:nvSpPr>
+          <p:cNvPr id="9" name="Метка PlanService и алгоритм · domain"/>
+          <p:cNvSpPr/>
+          <p:nvPr/>
+        </p:nvSpPr>
+        <p:spPr>
+          <a:xfrm>
+            <a:off x="777240" y="2852928"/>
+            <a:ext cx="4114800" cy="402336"/>
+          </a:xfrm>
+          <a:prstGeom prst="roundRect">
+            <a:avLst>
+              <a:gd name="adj" fmla="val 45455"/>
             </a:avLst>
           </a:prstGeom>
           <a:solidFill>
@@ -5647,93 +5774,191 @@
           </a:solidFill>
           <a:ln/>
         </p:spPr>
-      </p:sp>
-      <p:sp>
-        <p:nvSpPr>
-          <p:cNvPr id="7" name="Text 5"/>
+        <p:txBody>
+          <a:bodyPr wrap="square" lIns="635" tIns="635" rIns="635" bIns="635" rtlCol="0" anchor="ctr"/>
+          <a:lstStyle/>
+          <a:p>
+            <a:pPr algn="ctr" indent="0" marL="0">
+              <a:buNone/>
+            </a:pPr>
+            <a:r>
+              <a:rPr lang="en-US" sz="1300" b="1" dirty="0">
+                <a:solidFill>
+                  <a:schemeClr val="bg1"/>
+                </a:solidFill>
+              </a:rPr>
+              <a:t>PlanService и алгоритм · domain</a:t>
+            </a:r>
+            <a:endParaRPr lang="en-US" sz="1300" dirty="0"/>
+          </a:p>
+        </p:txBody>
+      </p:sp>
+      <p:sp>
+        <p:nvSpPr>
+          <p:cNvPr id="10" name="Text 8"/>
           <p:cNvSpPr txBox="1"/>
           <p:nvPr/>
         </p:nvSpPr>
         <p:spPr>
           <a:xfrm>
-            <a:off x="822960" y="3154680"/>
-            <a:ext cx="4572000" cy="365760"/>
-          </a:xfrm>
-          <a:prstGeom prst="rect">
-            <a:avLst/>
-          </a:prstGeom>
-          <a:noFill/>
-          <a:ln/>
-        </p:spPr>
-        <p:txBody>
-          <a:bodyPr wrap="square" lIns="0" tIns="0" rIns="0" bIns="0" rtlCol="0" anchor="t"/>
-          <a:lstStyle/>
-          <a:p>
-            <a:pPr indent="0" marL="0">
-              <a:buNone/>
-            </a:pPr>
-            <a:r>
-              <a:rPr lang="en-US" sz="1900" b="1" dirty="0">
-                <a:solidFill>
-                  <a:schemeClr val="bg1"/>
-                </a:solidFill>
-              </a:rPr>
-              <a:t>Domain · чистый Dart</a:t>
-            </a:r>
-            <a:endParaRPr lang="en-US" sz="1900" dirty="0"/>
-          </a:p>
-        </p:txBody>
-      </p:sp>
-      <p:sp>
-        <p:nvSpPr>
-          <p:cNvPr id="8" name="Text 6"/>
-          <p:cNvSpPr txBox="1"/>
-          <p:nvPr/>
-        </p:nvSpPr>
-        <p:spPr>
-          <a:xfrm>
-            <a:off x="822960" y="3566160"/>
-            <a:ext cx="4663440" cy="640080"/>
-          </a:xfrm>
-          <a:prstGeom prst="rect">
-            <a:avLst/>
-          </a:prstGeom>
-          <a:noFill/>
-          <a:ln/>
-        </p:spPr>
-        <p:txBody>
-          <a:bodyPr wrap="square" lIns="0" tIns="0" rIns="0" bIns="0" rtlCol="0" anchor="t"/>
-          <a:lstStyle/>
-          <a:p>
-            <a:pPr indent="0" marL="0">
-              <a:buNone/>
-            </a:pPr>
-            <a:r>
-              <a:rPr lang="en-US" sz="1400" dirty="0">
-                <a:solidFill>
-                  <a:schemeClr val="bg1"/>
-                </a:solidFill>
-              </a:rPr>
-              <a:t>Алгоритм плана, сущности, интерфейсы репозиториев. Не зависит от Flutter</a:t>
-            </a:r>
-            <a:endParaRPr lang="en-US" sz="1400" dirty="0"/>
-          </a:p>
-        </p:txBody>
-      </p:sp>
-      <p:sp>
-        <p:nvSpPr>
-          <p:cNvPr id="9" name="Слой Data"/>
+            <a:off x="2651760" y="3236976"/>
+            <a:ext cx="365760" cy="128016"/>
+          </a:xfrm>
+          <a:prstGeom prst="rect">
+            <a:avLst/>
+          </a:prstGeom>
+          <a:noFill/>
+          <a:ln/>
+        </p:spPr>
+        <p:txBody>
+          <a:bodyPr wrap="square" lIns="0" tIns="0" rIns="0" bIns="0" rtlCol="0" anchor="ctr"/>
+          <a:lstStyle/>
+          <a:p>
+            <a:pPr algn="ctr" indent="0" marL="0">
+              <a:buNone/>
+            </a:pPr>
+            <a:r>
+              <a:rPr lang="en-US" sz="900" dirty="0">
+                <a:solidFill>
+                  <a:schemeClr val="accent1"/>
+                </a:solidFill>
+              </a:rPr>
+              <a:t>↓</a:t>
+            </a:r>
+            <a:endParaRPr lang="en-US" sz="900" dirty="0"/>
+          </a:p>
+        </p:txBody>
+      </p:sp>
+      <p:sp>
+        <p:nvSpPr>
+          <p:cNvPr id="11" name="Метка Репозитории API"/>
           <p:cNvSpPr/>
           <p:nvPr/>
         </p:nvSpPr>
         <p:spPr>
           <a:xfrm>
-            <a:off x="548640" y="4572000"/>
-            <a:ext cx="5120640" cy="1280160"/>
+            <a:off x="777240" y="3355848"/>
+            <a:ext cx="4114800" cy="402336"/>
           </a:xfrm>
           <a:prstGeom prst="roundRect">
             <a:avLst>
-              <a:gd name="adj" fmla="val 8571"/>
+              <a:gd name="adj" fmla="val 45455"/>
+            </a:avLst>
+          </a:prstGeom>
+          <a:solidFill>
+            <a:schemeClr val="bg1"/>
+          </a:solidFill>
+          <a:ln/>
+        </p:spPr>
+        <p:txBody>
+          <a:bodyPr wrap="square" lIns="635" tIns="635" rIns="635" bIns="635" rtlCol="0" anchor="ctr"/>
+          <a:lstStyle/>
+          <a:p>
+            <a:pPr algn="ctr" indent="0" marL="0">
+              <a:buNone/>
+            </a:pPr>
+            <a:r>
+              <a:rPr lang="en-US" sz="1300" b="1" dirty="0">
+                <a:solidFill>
+                  <a:schemeClr val="tx2"/>
+                </a:solidFill>
+              </a:rPr>
+              <a:t>Репозитории API</a:t>
+            </a:r>
+            <a:endParaRPr lang="en-US" sz="1300" dirty="0"/>
+          </a:p>
+        </p:txBody>
+      </p:sp>
+      <p:sp>
+        <p:nvSpPr>
+          <p:cNvPr id="12" name="Text 10"/>
+          <p:cNvSpPr txBox="1"/>
+          <p:nvPr/>
+        </p:nvSpPr>
+        <p:spPr>
+          <a:xfrm>
+            <a:off x="2651760" y="3739896"/>
+            <a:ext cx="365760" cy="128016"/>
+          </a:xfrm>
+          <a:prstGeom prst="rect">
+            <a:avLst/>
+          </a:prstGeom>
+          <a:noFill/>
+          <a:ln/>
+        </p:spPr>
+        <p:txBody>
+          <a:bodyPr wrap="square" lIns="0" tIns="0" rIns="0" bIns="0" rtlCol="0" anchor="ctr"/>
+          <a:lstStyle/>
+          <a:p>
+            <a:pPr algn="ctr" indent="0" marL="0">
+              <a:buNone/>
+            </a:pPr>
+            <a:r>
+              <a:rPr lang="en-US" sz="900" dirty="0">
+                <a:solidFill>
+                  <a:schemeClr val="accent1"/>
+                </a:solidFill>
+              </a:rPr>
+              <a:t>↓</a:t>
+            </a:r>
+            <a:endParaRPr lang="en-US" sz="900" dirty="0"/>
+          </a:p>
+        </p:txBody>
+      </p:sp>
+      <p:sp>
+        <p:nvSpPr>
+          <p:cNvPr id="13" name="Метка ApiClient: токен, ожидание 10 с, ошибки"/>
+          <p:cNvSpPr/>
+          <p:nvPr/>
+        </p:nvSpPr>
+        <p:spPr>
+          <a:xfrm>
+            <a:off x="777240" y="3858768"/>
+            <a:ext cx="4114800" cy="402336"/>
+          </a:xfrm>
+          <a:prstGeom prst="roundRect">
+            <a:avLst>
+              <a:gd name="adj" fmla="val 45455"/>
+            </a:avLst>
+          </a:prstGeom>
+          <a:solidFill>
+            <a:schemeClr val="bg1"/>
+          </a:solidFill>
+          <a:ln/>
+        </p:spPr>
+        <p:txBody>
+          <a:bodyPr wrap="square" lIns="635" tIns="635" rIns="635" bIns="635" rtlCol="0" anchor="ctr"/>
+          <a:lstStyle/>
+          <a:p>
+            <a:pPr algn="ctr" indent="0" marL="0">
+              <a:buNone/>
+            </a:pPr>
+            <a:r>
+              <a:rPr lang="en-US" sz="1300" b="1" dirty="0">
+                <a:solidFill>
+                  <a:schemeClr val="tx2"/>
+                </a:solidFill>
+              </a:rPr>
+              <a:t>ApiClient: токен, ожидание 10 с, ошибки</a:t>
+            </a:r>
+            <a:endParaRPr lang="en-US" sz="1300" dirty="0"/>
+          </a:p>
+        </p:txBody>
+      </p:sp>
+      <p:sp>
+        <p:nvSpPr>
+          <p:cNvPr id="14" name="Сервер"/>
+          <p:cNvSpPr/>
+          <p:nvPr/>
+        </p:nvSpPr>
+        <p:spPr>
+          <a:xfrm>
+            <a:off x="7068312" y="1280160"/>
+            <a:ext cx="4572000" cy="3154680"/>
+          </a:xfrm>
+          <a:prstGeom prst="roundRect">
+            <a:avLst>
+              <a:gd name="adj" fmla="val 3478"/>
             </a:avLst>
           </a:prstGeom>
           <a:solidFill>
@@ -5744,14 +5969,14 @@
       </p:sp>
       <p:sp>
         <p:nvSpPr>
-          <p:cNvPr id="10" name="Text 8"/>
+          <p:cNvPr id="15" name="Text 13"/>
           <p:cNvSpPr txBox="1"/>
           <p:nvPr/>
         </p:nvSpPr>
         <p:spPr>
           <a:xfrm>
-            <a:off x="822960" y="4754880"/>
-            <a:ext cx="4572000" cy="365760"/>
+            <a:off x="7296912" y="1389888"/>
+            <a:ext cx="4206240" cy="365760"/>
           </a:xfrm>
           <a:prstGeom prst="rect">
             <a:avLst/>
@@ -5767,139 +5992,42 @@
               <a:buNone/>
             </a:pPr>
             <a:r>
-              <a:rPr lang="en-US" sz="1900" b="1" dirty="0">
+              <a:rPr lang="en-US" sz="1700" b="1" dirty="0">
                 <a:solidFill>
                   <a:schemeClr val="tx2"/>
                 </a:solidFill>
               </a:rPr>
-              <a:t>Data</a:t>
-            </a:r>
-            <a:endParaRPr lang="en-US" sz="1900" dirty="0"/>
-          </a:p>
-        </p:txBody>
-      </p:sp>
-      <p:sp>
-        <p:nvSpPr>
-          <p:cNvPr id="11" name="Text 9"/>
-          <p:cNvSpPr txBox="1"/>
-          <p:nvPr/>
-        </p:nvSpPr>
-        <p:spPr>
-          <a:xfrm>
-            <a:off x="822960" y="5166360"/>
-            <a:ext cx="4663440" cy="640080"/>
-          </a:xfrm>
-          <a:prstGeom prst="rect">
-            <a:avLst/>
-          </a:prstGeom>
-          <a:noFill/>
-          <a:ln/>
-        </p:spPr>
-        <p:txBody>
-          <a:bodyPr wrap="square" lIns="0" tIns="0" rIns="0" bIns="0" rtlCol="0" anchor="t"/>
-          <a:lstStyle/>
-          <a:p>
+              <a:t>Сервер API</a:t>
+            </a:r>
             <a:pPr indent="0" marL="0">
               <a:buNone/>
             </a:pPr>
             <a:r>
-              <a:rPr lang="en-US" sz="1400" dirty="0">
-                <a:solidFill>
-                  <a:schemeClr val="tx1"/>
-                </a:solidFill>
-              </a:rPr>
-              <a:t>drift (SQLite), JSON-каталог тем, настройки, уведомления</a:t>
-            </a:r>
-            <a:endParaRPr lang="en-US" sz="1400" dirty="0"/>
-          </a:p>
-        </p:txBody>
-      </p:sp>
-      <p:sp>
-        <p:nvSpPr>
-          <p:cNvPr id="12" name="Text 10"/>
-          <p:cNvSpPr txBox="1"/>
-          <p:nvPr/>
-        </p:nvSpPr>
-        <p:spPr>
-          <a:xfrm>
-            <a:off x="2377440" y="2651760"/>
-            <a:ext cx="1828800" cy="320040"/>
-          </a:xfrm>
-          <a:prstGeom prst="rect">
-            <a:avLst/>
-          </a:prstGeom>
-          <a:noFill/>
-          <a:ln/>
-        </p:spPr>
-        <p:txBody>
-          <a:bodyPr wrap="square" lIns="0" tIns="0" rIns="0" bIns="0" rtlCol="0" anchor="ctr"/>
-          <a:lstStyle/>
-          <a:p>
-            <a:pPr algn="ctr" indent="0" marL="0">
-              <a:buNone/>
-            </a:pPr>
-            <a:r>
-              <a:rPr lang="en-US" sz="1200" b="1" dirty="0">
-                <a:solidFill>
-                  <a:schemeClr val="accent1"/>
-                </a:solidFill>
-              </a:rPr>
-              <a:t>↓ вызывает</a:t>
-            </a:r>
-            <a:endParaRPr lang="en-US" sz="1200" dirty="0"/>
-          </a:p>
-        </p:txBody>
-      </p:sp>
-      <p:sp>
-        <p:nvSpPr>
-          <p:cNvPr id="13" name="Text 11"/>
-          <p:cNvSpPr txBox="1"/>
-          <p:nvPr/>
-        </p:nvSpPr>
-        <p:spPr>
-          <a:xfrm>
-            <a:off x="1920240" y="4251960"/>
-            <a:ext cx="2743200" cy="320040"/>
-          </a:xfrm>
-          <a:prstGeom prst="rect">
-            <a:avLst/>
-          </a:prstGeom>
-          <a:noFill/>
-          <a:ln/>
-        </p:spPr>
-        <p:txBody>
-          <a:bodyPr wrap="square" lIns="0" tIns="0" rIns="0" bIns="0" rtlCol="0" anchor="ctr"/>
-          <a:lstStyle/>
-          <a:p>
-            <a:pPr algn="ctr" indent="0" marL="0">
-              <a:buNone/>
-            </a:pPr>
-            <a:r>
-              <a:rPr lang="en-US" sz="1200" b="1" dirty="0">
-                <a:solidFill>
-                  <a:schemeClr val="accent1"/>
-                </a:solidFill>
-              </a:rPr>
-              <a:t>↑ реализует интерфейсы</a:t>
-            </a:r>
-            <a:endParaRPr lang="en-US" sz="1200" dirty="0"/>
-          </a:p>
-        </p:txBody>
-      </p:sp>
-      <p:sp>
-        <p:nvSpPr>
-          <p:cNvPr id="14" name="Выбор Состояние"/>
+              <a:rPr lang="en-US" sz="1300" dirty="0">
+                <a:solidFill>
+                  <a:schemeClr val="accent6"/>
+                </a:solidFill>
+              </a:rPr>
+              <a:t>  Dart, shelf, ноутбук</a:t>
+            </a:r>
+            <a:endParaRPr lang="en-US" sz="1700" dirty="0"/>
+          </a:p>
+        </p:txBody>
+      </p:sp>
+      <p:sp>
+        <p:nvSpPr>
+          <p:cNvPr id="16" name="Метка Маршруты shelf_router · 39 адресов"/>
           <p:cNvSpPr/>
           <p:nvPr/>
         </p:nvSpPr>
         <p:spPr>
           <a:xfrm>
-            <a:off x="6035040" y="1371600"/>
-            <a:ext cx="5605272" cy="1051560"/>
+            <a:off x="7296912" y="1847088"/>
+            <a:ext cx="4114800" cy="402336"/>
           </a:xfrm>
           <a:prstGeom prst="roundRect">
             <a:avLst>
-              <a:gd name="adj" fmla="val 10435"/>
+              <a:gd name="adj" fmla="val 45455"/>
             </a:avLst>
           </a:prstGeom>
           <a:solidFill>
@@ -5907,23 +6035,392 @@
           </a:solidFill>
           <a:ln/>
         </p:spPr>
-      </p:sp>
-      <p:sp>
-        <p:nvSpPr>
-          <p:cNvPr id="15" name="Рамка Состояние"/>
+        <p:txBody>
+          <a:bodyPr wrap="square" lIns="635" tIns="635" rIns="635" bIns="635" rtlCol="0" anchor="ctr"/>
+          <a:lstStyle/>
+          <a:p>
+            <a:pPr algn="ctr" indent="0" marL="0">
+              <a:buNone/>
+            </a:pPr>
+            <a:r>
+              <a:rPr lang="en-US" sz="1300" b="1" dirty="0">
+                <a:solidFill>
+                  <a:schemeClr val="tx2"/>
+                </a:solidFill>
+              </a:rPr>
+              <a:t>Маршруты shelf_router · 39 адресов</a:t>
+            </a:r>
+            <a:endParaRPr lang="en-US" sz="1300" dirty="0"/>
+          </a:p>
+        </p:txBody>
+      </p:sp>
+      <p:sp>
+        <p:nvSpPr>
+          <p:cNvPr id="17" name="Text 15"/>
+          <p:cNvSpPr txBox="1"/>
+          <p:nvPr/>
+        </p:nvSpPr>
+        <p:spPr>
+          <a:xfrm>
+            <a:off x="9171432" y="2231136"/>
+            <a:ext cx="365760" cy="128016"/>
+          </a:xfrm>
+          <a:prstGeom prst="rect">
+            <a:avLst/>
+          </a:prstGeom>
+          <a:noFill/>
+          <a:ln/>
+        </p:spPr>
+        <p:txBody>
+          <a:bodyPr wrap="square" lIns="0" tIns="0" rIns="0" bIns="0" rtlCol="0" anchor="ctr"/>
+          <a:lstStyle/>
+          <a:p>
+            <a:pPr algn="ctr" indent="0" marL="0">
+              <a:buNone/>
+            </a:pPr>
+            <a:r>
+              <a:rPr lang="en-US" sz="900" dirty="0">
+                <a:solidFill>
+                  <a:schemeClr val="accent1"/>
+                </a:solidFill>
+              </a:rPr>
+              <a:t>↓</a:t>
+            </a:r>
+            <a:endParaRPr lang="en-US" sz="900" dirty="0"/>
+          </a:p>
+        </p:txBody>
+      </p:sp>
+      <p:sp>
+        <p:nvSpPr>
+          <p:cNvPr id="18" name="Метка Проверка токена, данных и владельца"/>
           <p:cNvSpPr/>
           <p:nvPr/>
         </p:nvSpPr>
         <p:spPr>
           <a:xfrm>
-            <a:off x="6035040" y="1371600"/>
-            <a:ext cx="5605272" cy="1051560"/>
+            <a:off x="7296912" y="2350008"/>
+            <a:ext cx="4114800" cy="402336"/>
           </a:xfrm>
           <a:prstGeom prst="roundRect">
             <a:avLst>
-              <a:gd name="adj" fmla="val 10435"/>
+              <a:gd name="adj" fmla="val 45455"/>
             </a:avLst>
           </a:prstGeom>
+          <a:solidFill>
+            <a:schemeClr val="tx2"/>
+          </a:solidFill>
+          <a:ln/>
+        </p:spPr>
+        <p:txBody>
+          <a:bodyPr wrap="square" lIns="635" tIns="635" rIns="635" bIns="635" rtlCol="0" anchor="ctr"/>
+          <a:lstStyle/>
+          <a:p>
+            <a:pPr algn="ctr" indent="0" marL="0">
+              <a:buNone/>
+            </a:pPr>
+            <a:r>
+              <a:rPr lang="en-US" sz="1300" b="1" dirty="0">
+                <a:solidFill>
+                  <a:schemeClr val="bg1"/>
+                </a:solidFill>
+              </a:rPr>
+              <a:t>Проверка токена, данных и владельца</a:t>
+            </a:r>
+            <a:endParaRPr lang="en-US" sz="1300" dirty="0"/>
+          </a:p>
+        </p:txBody>
+      </p:sp>
+      <p:sp>
+        <p:nvSpPr>
+          <p:cNvPr id="19" name="Text 17"/>
+          <p:cNvSpPr txBox="1"/>
+          <p:nvPr/>
+        </p:nvSpPr>
+        <p:spPr>
+          <a:xfrm>
+            <a:off x="9171432" y="2734056"/>
+            <a:ext cx="365760" cy="128016"/>
+          </a:xfrm>
+          <a:prstGeom prst="rect">
+            <a:avLst/>
+          </a:prstGeom>
+          <a:noFill/>
+          <a:ln/>
+        </p:spPr>
+        <p:txBody>
+          <a:bodyPr wrap="square" lIns="0" tIns="0" rIns="0" bIns="0" rtlCol="0" anchor="ctr"/>
+          <a:lstStyle/>
+          <a:p>
+            <a:pPr algn="ctr" indent="0" marL="0">
+              <a:buNone/>
+            </a:pPr>
+            <a:r>
+              <a:rPr lang="en-US" sz="900" dirty="0">
+                <a:solidFill>
+                  <a:schemeClr val="accent1"/>
+                </a:solidFill>
+              </a:rPr>
+              <a:t>↓</a:t>
+            </a:r>
+            <a:endParaRPr lang="en-US" sz="900" dirty="0"/>
+          </a:p>
+        </p:txBody>
+      </p:sp>
+      <p:sp>
+        <p:nvSpPr>
+          <p:cNvPr id="20" name="Метка Репозитории drift"/>
+          <p:cNvSpPr/>
+          <p:nvPr/>
+        </p:nvSpPr>
+        <p:spPr>
+          <a:xfrm>
+            <a:off x="7296912" y="2852928"/>
+            <a:ext cx="4114800" cy="402336"/>
+          </a:xfrm>
+          <a:prstGeom prst="roundRect">
+            <a:avLst>
+              <a:gd name="adj" fmla="val 45455"/>
+            </a:avLst>
+          </a:prstGeom>
+          <a:solidFill>
+            <a:schemeClr val="bg1"/>
+          </a:solidFill>
+          <a:ln/>
+        </p:spPr>
+        <p:txBody>
+          <a:bodyPr wrap="square" lIns="635" tIns="635" rIns="635" bIns="635" rtlCol="0" anchor="ctr"/>
+          <a:lstStyle/>
+          <a:p>
+            <a:pPr algn="ctr" indent="0" marL="0">
+              <a:buNone/>
+            </a:pPr>
+            <a:r>
+              <a:rPr lang="en-US" sz="1300" b="1" dirty="0">
+                <a:solidFill>
+                  <a:schemeClr val="tx2"/>
+                </a:solidFill>
+              </a:rPr>
+              <a:t>Репозитории drift</a:t>
+            </a:r>
+            <a:endParaRPr lang="en-US" sz="1300" dirty="0"/>
+          </a:p>
+        </p:txBody>
+      </p:sp>
+      <p:sp>
+        <p:nvSpPr>
+          <p:cNvPr id="21" name="Text 19"/>
+          <p:cNvSpPr txBox="1"/>
+          <p:nvPr/>
+        </p:nvSpPr>
+        <p:spPr>
+          <a:xfrm>
+            <a:off x="9171432" y="3236976"/>
+            <a:ext cx="365760" cy="128016"/>
+          </a:xfrm>
+          <a:prstGeom prst="rect">
+            <a:avLst/>
+          </a:prstGeom>
+          <a:noFill/>
+          <a:ln/>
+        </p:spPr>
+        <p:txBody>
+          <a:bodyPr wrap="square" lIns="0" tIns="0" rIns="0" bIns="0" rtlCol="0" anchor="ctr"/>
+          <a:lstStyle/>
+          <a:p>
+            <a:pPr algn="ctr" indent="0" marL="0">
+              <a:buNone/>
+            </a:pPr>
+            <a:r>
+              <a:rPr lang="en-US" sz="900" dirty="0">
+                <a:solidFill>
+                  <a:schemeClr val="accent1"/>
+                </a:solidFill>
+              </a:rPr>
+              <a:t>↓</a:t>
+            </a:r>
+            <a:endParaRPr lang="en-US" sz="900" dirty="0"/>
+          </a:p>
+        </p:txBody>
+      </p:sp>
+      <p:sp>
+        <p:nvSpPr>
+          <p:cNvPr id="22" name="Метка База SQLite · 9 таблиц"/>
+          <p:cNvSpPr/>
+          <p:nvPr/>
+        </p:nvSpPr>
+        <p:spPr>
+          <a:xfrm>
+            <a:off x="7296912" y="3355848"/>
+            <a:ext cx="4114800" cy="402336"/>
+          </a:xfrm>
+          <a:prstGeom prst="roundRect">
+            <a:avLst>
+              <a:gd name="adj" fmla="val 45455"/>
+            </a:avLst>
+          </a:prstGeom>
+          <a:solidFill>
+            <a:schemeClr val="bg1"/>
+          </a:solidFill>
+          <a:ln/>
+        </p:spPr>
+        <p:txBody>
+          <a:bodyPr wrap="square" lIns="635" tIns="635" rIns="635" bIns="635" rtlCol="0" anchor="ctr"/>
+          <a:lstStyle/>
+          <a:p>
+            <a:pPr algn="ctr" indent="0" marL="0">
+              <a:buNone/>
+            </a:pPr>
+            <a:r>
+              <a:rPr lang="en-US" sz="1300" b="1" dirty="0">
+                <a:solidFill>
+                  <a:schemeClr val="tx2"/>
+                </a:solidFill>
+              </a:rPr>
+              <a:t>База SQLite · 9 таблиц</a:t>
+            </a:r>
+            <a:endParaRPr lang="en-US" sz="1300" dirty="0"/>
+          </a:p>
+        </p:txBody>
+      </p:sp>
+      <p:sp>
+        <p:nvSpPr>
+          <p:cNvPr id="23" name="Запрос"/>
+          <p:cNvSpPr/>
+          <p:nvPr/>
+        </p:nvSpPr>
+        <p:spPr>
+          <a:xfrm>
+            <a:off x="5257800" y="2514600"/>
+            <a:ext cx="1673352" cy="0"/>
+          </a:xfrm>
+          <a:prstGeom prst="line">
+            <a:avLst/>
+          </a:prstGeom>
+          <a:noFill/>
+          <a:ln w="31750">
+            <a:solidFill>
+              <a:schemeClr val="accent1"/>
+            </a:solidFill>
+            <a:prstDash val="solid"/>
+            <a:tailEnd type="triangle"/>
+          </a:ln>
+        </p:spPr>
+      </p:sp>
+      <p:sp>
+        <p:nvSpPr>
+          <p:cNvPr id="24" name="Ответ"/>
+          <p:cNvSpPr/>
+          <p:nvPr/>
+        </p:nvSpPr>
+        <p:spPr>
+          <a:xfrm>
+            <a:off x="5257800" y="3429000"/>
+            <a:ext cx="1673352" cy="0"/>
+          </a:xfrm>
+          <a:prstGeom prst="line">
+            <a:avLst/>
+          </a:prstGeom>
+          <a:noFill/>
+          <a:ln w="31750">
+            <a:solidFill>
+              <a:schemeClr val="tx2"/>
+            </a:solidFill>
+            <a:prstDash val="solid"/>
+            <a:headEnd type="triangle"/>
+          </a:ln>
+        </p:spPr>
+      </p:sp>
+      <p:sp>
+        <p:nvSpPr>
+          <p:cNvPr id="25" name="Text 23"/>
+          <p:cNvSpPr txBox="1"/>
+          <p:nvPr/>
+        </p:nvSpPr>
+        <p:spPr>
+          <a:xfrm>
+            <a:off x="5166360" y="1874520"/>
+            <a:ext cx="1856232" cy="566928"/>
+          </a:xfrm>
+          <a:prstGeom prst="rect">
+            <a:avLst/>
+          </a:prstGeom>
+          <a:noFill/>
+          <a:ln/>
+        </p:spPr>
+        <p:txBody>
+          <a:bodyPr wrap="square" lIns="0" tIns="0" rIns="0" bIns="0" rtlCol="0" anchor="b"/>
+          <a:lstStyle/>
+          <a:p>
+            <a:pPr algn="ctr" indent="0" marL="0">
+              <a:buNone/>
+            </a:pPr>
+            <a:r>
+              <a:rPr lang="en-US" sz="1200" b="1" dirty="0">
+                <a:solidFill>
+                  <a:schemeClr val="accent1"/>
+                </a:solidFill>
+              </a:rPr>
+              <a:t>запрос HTTP + JSON, токен Bearer</a:t>
+            </a:r>
+            <a:endParaRPr lang="en-US" sz="1200" dirty="0"/>
+          </a:p>
+        </p:txBody>
+      </p:sp>
+      <p:sp>
+        <p:nvSpPr>
+          <p:cNvPr id="26" name="Text 24"/>
+          <p:cNvSpPr txBox="1"/>
+          <p:nvPr/>
+        </p:nvSpPr>
+        <p:spPr>
+          <a:xfrm>
+            <a:off x="5166360" y="3520440"/>
+            <a:ext cx="1856232" cy="566928"/>
+          </a:xfrm>
+          <a:prstGeom prst="rect">
+            <a:avLst/>
+          </a:prstGeom>
+          <a:noFill/>
+          <a:ln/>
+        </p:spPr>
+        <p:txBody>
+          <a:bodyPr wrap="square" lIns="0" tIns="0" rIns="0" bIns="0" rtlCol="0" anchor="t"/>
+          <a:lstStyle/>
+          <a:p>
+            <a:pPr algn="ctr" indent="0" marL="0">
+              <a:buNone/>
+            </a:pPr>
+            <a:r>
+              <a:rPr lang="en-US" sz="1200" b="1" dirty="0">
+                <a:solidFill>
+                  <a:schemeClr val="tx2"/>
+                </a:solidFill>
+              </a:rPr>
+              <a:t>ответ JSON, код 200 / 201 / 204 / 4xx</a:t>
+            </a:r>
+            <a:endParaRPr lang="en-US" sz="1200" dirty="0"/>
+          </a:p>
+        </p:txBody>
+      </p:sp>
+      <p:sp>
+        <p:nvSpPr>
+          <p:cNvPr id="27" name="Выбор Состояние"/>
+          <p:cNvSpPr/>
+          <p:nvPr/>
+        </p:nvSpPr>
+        <p:spPr>
+          <a:xfrm>
+            <a:off x="548640" y="4617720"/>
+            <a:ext cx="2633472" cy="1554480"/>
+          </a:xfrm>
+          <a:prstGeom prst="roundRect">
+            <a:avLst>
+              <a:gd name="adj" fmla="val 7059"/>
+            </a:avLst>
+          </a:prstGeom>
+          <a:solidFill>
+            <a:schemeClr val="bg1"/>
+          </a:solidFill>
           <a:ln w="12700">
             <a:solidFill>
               <a:srgbClr val="D5DCEC"/>
@@ -5934,14 +6431,14 @@
       </p:sp>
       <p:sp>
         <p:nvSpPr>
-          <p:cNvPr id="16" name="Text 14"/>
+          <p:cNvPr id="28" name="Text 26"/>
           <p:cNvSpPr txBox="1"/>
           <p:nvPr/>
         </p:nvSpPr>
         <p:spPr>
           <a:xfrm>
-            <a:off x="6263640" y="1481328"/>
-            <a:ext cx="5212080" cy="320040"/>
+            <a:off x="731520" y="4727448"/>
+            <a:ext cx="2286000" cy="274320"/>
           </a:xfrm>
           <a:prstGeom prst="rect">
             <a:avLst/>
@@ -5957,113 +6454,108 @@
               <a:buNone/>
             </a:pPr>
             <a:r>
-              <a:rPr lang="en-US" sz="1600" dirty="0">
+              <a:rPr lang="en-US" sz="1300" dirty="0">
                 <a:solidFill>
                   <a:schemeClr val="accent6"/>
                 </a:solidFill>
               </a:rPr>
-              <a:t>Состояние: </a:t>
-            </a:r>
+              <a:t>Состояние</a:t>
+            </a:r>
+            <a:endParaRPr lang="en-US" sz="1300" dirty="0"/>
+          </a:p>
+        </p:txBody>
+      </p:sp>
+      <p:sp>
+        <p:nvSpPr>
+          <p:cNvPr id="29" name="Text 27"/>
+          <p:cNvSpPr txBox="1"/>
+          <p:nvPr/>
+        </p:nvSpPr>
+        <p:spPr>
+          <a:xfrm>
+            <a:off x="731520" y="5001768"/>
+            <a:ext cx="2286000" cy="365760"/>
+          </a:xfrm>
+          <a:prstGeom prst="rect">
+            <a:avLst/>
+          </a:prstGeom>
+          <a:noFill/>
+          <a:ln/>
+        </p:spPr>
+        <p:txBody>
+          <a:bodyPr wrap="square" lIns="0" tIns="0" rIns="0" bIns="0" rtlCol="0" anchor="t"/>
+          <a:lstStyle/>
+          <a:p>
             <a:pPr indent="0" marL="0">
               <a:buNone/>
             </a:pPr>
             <a:r>
-              <a:rPr lang="en-US" sz="1600" b="1" dirty="0">
+              <a:rPr lang="en-US" sz="1700" b="1" dirty="0">
                 <a:solidFill>
                   <a:schemeClr val="accent1"/>
                 </a:solidFill>
               </a:rPr>
               <a:t>Riverpod</a:t>
             </a:r>
+            <a:endParaRPr lang="en-US" sz="1700" dirty="0"/>
+          </a:p>
+        </p:txBody>
+      </p:sp>
+      <p:sp>
+        <p:nvSpPr>
+          <p:cNvPr id="30" name="Text 28"/>
+          <p:cNvSpPr txBox="1"/>
+          <p:nvPr/>
+        </p:nvSpPr>
+        <p:spPr>
+          <a:xfrm>
+            <a:off x="731520" y="5394960"/>
+            <a:ext cx="2331720" cy="731520"/>
+          </a:xfrm>
+          <a:prstGeom prst="rect">
+            <a:avLst/>
+          </a:prstGeom>
+          <a:noFill/>
+          <a:ln/>
+        </p:spPr>
+        <p:txBody>
+          <a:bodyPr wrap="square" lIns="0" tIns="0" rIns="0" bIns="0" rtlCol="0" anchor="t"/>
+          <a:lstStyle/>
+          <a:p>
             <a:pPr indent="0" marL="0">
               <a:buNone/>
             </a:pPr>
             <a:r>
               <a:rPr lang="en-US" sz="1200" dirty="0">
                 <a:solidFill>
-                  <a:schemeClr val="accent6"/>
-                </a:solidFill>
-              </a:rPr>
-              <a:t>  вместо BLoC, Provider</a:t>
-            </a:r>
-            <a:endParaRPr lang="en-US" sz="1600" dirty="0"/>
-          </a:p>
-        </p:txBody>
-      </p:sp>
-      <p:sp>
-        <p:nvSpPr>
-          <p:cNvPr id="17" name="Text 15"/>
-          <p:cNvSpPr txBox="1"/>
-          <p:nvPr/>
-        </p:nvSpPr>
-        <p:spPr>
-          <a:xfrm>
-            <a:off x="6263640" y="1828800"/>
-            <a:ext cx="5212080" cy="548640"/>
-          </a:xfrm>
-          <a:prstGeom prst="rect">
-            <a:avLst/>
-          </a:prstGeom>
-          <a:noFill/>
-          <a:ln/>
-        </p:spPr>
-        <p:txBody>
-          <a:bodyPr wrap="square" lIns="0" tIns="0" rIns="0" bIns="0" rtlCol="0" anchor="t"/>
-          <a:lstStyle/>
-          <a:p>
-            <a:pPr indent="0" marL="0">
-              <a:buNone/>
-            </a:pPr>
-            <a:r>
-              <a:rPr lang="en-US" sz="1300" dirty="0">
-                <a:solidFill>
                   <a:schemeClr val="tx1"/>
                 </a:solidFill>
               </a:rPr>
-              <a:t>Меньше шаблонного кода, чем BLoC; не зависит от BuildContext; зависимости подменяются в тестах</a:t>
-            </a:r>
-            <a:endParaRPr lang="en-US" sz="1300" dirty="0"/>
-          </a:p>
-        </p:txBody>
-      </p:sp>
-      <p:sp>
-        <p:nvSpPr>
-          <p:cNvPr id="18" name="Выбор Хранение"/>
+              <a:t>вместо BLoC и Provider: меньше кода, подмена в тестах</a:t>
+            </a:r>
+            <a:endParaRPr lang="en-US" sz="1200" dirty="0"/>
+          </a:p>
+        </p:txBody>
+      </p:sp>
+      <p:sp>
+        <p:nvSpPr>
+          <p:cNvPr id="31" name="Выбор Данные"/>
           <p:cNvSpPr/>
           <p:nvPr/>
         </p:nvSpPr>
         <p:spPr>
           <a:xfrm>
-            <a:off x="6035040" y="2560320"/>
-            <a:ext cx="5605272" cy="1051560"/>
+            <a:off x="3364992" y="4617720"/>
+            <a:ext cx="2633472" cy="1554480"/>
           </a:xfrm>
           <a:prstGeom prst="roundRect">
             <a:avLst>
-              <a:gd name="adj" fmla="val 10435"/>
+              <a:gd name="adj" fmla="val 7059"/>
             </a:avLst>
           </a:prstGeom>
           <a:solidFill>
             <a:schemeClr val="bg1"/>
           </a:solidFill>
-          <a:ln/>
-        </p:spPr>
-      </p:sp>
-      <p:sp>
-        <p:nvSpPr>
-          <p:cNvPr id="19" name="Рамка Хранение"/>
-          <p:cNvSpPr/>
-          <p:nvPr/>
-        </p:nvSpPr>
-        <p:spPr>
-          <a:xfrm>
-            <a:off x="6035040" y="2560320"/>
-            <a:ext cx="5605272" cy="1051560"/>
-          </a:xfrm>
-          <a:prstGeom prst="roundRect">
-            <a:avLst>
-              <a:gd name="adj" fmla="val 10435"/>
-            </a:avLst>
-          </a:prstGeom>
           <a:ln w="12700">
             <a:solidFill>
               <a:srgbClr val="D5DCEC"/>
@@ -6074,14 +6566,14 @@
       </p:sp>
       <p:sp>
         <p:nvSpPr>
-          <p:cNvPr id="20" name="Text 18"/>
+          <p:cNvPr id="32" name="Text 30"/>
           <p:cNvSpPr txBox="1"/>
           <p:nvPr/>
         </p:nvSpPr>
         <p:spPr>
           <a:xfrm>
-            <a:off x="6263640" y="2670048"/>
-            <a:ext cx="5212080" cy="320040"/>
+            <a:off x="3547872" y="4727448"/>
+            <a:ext cx="2286000" cy="274320"/>
           </a:xfrm>
           <a:prstGeom prst="rect">
             <a:avLst/>
@@ -6097,113 +6589,108 @@
               <a:buNone/>
             </a:pPr>
             <a:r>
-              <a:rPr lang="en-US" sz="1600" dirty="0">
+              <a:rPr lang="en-US" sz="1300" dirty="0">
                 <a:solidFill>
                   <a:schemeClr val="accent6"/>
                 </a:solidFill>
               </a:rPr>
-              <a:t>Хранение: </a:t>
-            </a:r>
+              <a:t>Данные</a:t>
+            </a:r>
+            <a:endParaRPr lang="en-US" sz="1300" dirty="0"/>
+          </a:p>
+        </p:txBody>
+      </p:sp>
+      <p:sp>
+        <p:nvSpPr>
+          <p:cNvPr id="33" name="Text 31"/>
+          <p:cNvSpPr txBox="1"/>
+          <p:nvPr/>
+        </p:nvSpPr>
+        <p:spPr>
+          <a:xfrm>
+            <a:off x="3547872" y="5001768"/>
+            <a:ext cx="2286000" cy="365760"/>
+          </a:xfrm>
+          <a:prstGeom prst="rect">
+            <a:avLst/>
+          </a:prstGeom>
+          <a:noFill/>
+          <a:ln/>
+        </p:spPr>
+        <p:txBody>
+          <a:bodyPr wrap="square" lIns="0" tIns="0" rIns="0" bIns="0" rtlCol="0" anchor="t"/>
+          <a:lstStyle/>
+          <a:p>
             <a:pPr indent="0" marL="0">
               <a:buNone/>
             </a:pPr>
             <a:r>
-              <a:rPr lang="en-US" sz="1600" b="1" dirty="0">
+              <a:rPr lang="en-US" sz="1700" b="1" dirty="0">
                 <a:solidFill>
                   <a:schemeClr val="accent1"/>
                 </a:solidFill>
               </a:rPr>
-              <a:t>drift (SQLite)</a:t>
-            </a:r>
+              <a:t>свой сервер API</a:t>
+            </a:r>
+            <a:endParaRPr lang="en-US" sz="1700" dirty="0"/>
+          </a:p>
+        </p:txBody>
+      </p:sp>
+      <p:sp>
+        <p:nvSpPr>
+          <p:cNvPr id="34" name="Text 32"/>
+          <p:cNvSpPr txBox="1"/>
+          <p:nvPr/>
+        </p:nvSpPr>
+        <p:spPr>
+          <a:xfrm>
+            <a:off x="3547872" y="5394960"/>
+            <a:ext cx="2331720" cy="731520"/>
+          </a:xfrm>
+          <a:prstGeom prst="rect">
+            <a:avLst/>
+          </a:prstGeom>
+          <a:noFill/>
+          <a:ln/>
+        </p:spPr>
+        <p:txBody>
+          <a:bodyPr wrap="square" lIns="0" tIns="0" rIns="0" bIns="0" rtlCol="0" anchor="t"/>
+          <a:lstStyle/>
+          <a:p>
             <a:pPr indent="0" marL="0">
               <a:buNone/>
             </a:pPr>
             <a:r>
               <a:rPr lang="en-US" sz="1200" dirty="0">
                 <a:solidFill>
-                  <a:schemeClr val="accent6"/>
-                </a:solidFill>
-              </a:rPr>
-              <a:t>  вместо Hive, Firebase</a:t>
-            </a:r>
-            <a:endParaRPr lang="en-US" sz="1600" dirty="0"/>
-          </a:p>
-        </p:txBody>
-      </p:sp>
-      <p:sp>
-        <p:nvSpPr>
-          <p:cNvPr id="21" name="Text 19"/>
-          <p:cNvSpPr txBox="1"/>
-          <p:nvPr/>
-        </p:nvSpPr>
-        <p:spPr>
-          <a:xfrm>
-            <a:off x="6263640" y="3017520"/>
-            <a:ext cx="5212080" cy="548640"/>
-          </a:xfrm>
-          <a:prstGeom prst="rect">
-            <a:avLst/>
-          </a:prstGeom>
-          <a:noFill/>
-          <a:ln/>
-        </p:spPr>
-        <p:txBody>
-          <a:bodyPr wrap="square" lIns="0" tIns="0" rIns="0" bIns="0" rtlCol="0" anchor="t"/>
-          <a:lstStyle/>
-          <a:p>
-            <a:pPr indent="0" marL="0">
-              <a:buNone/>
-            </a:pPr>
-            <a:r>
-              <a:rPr lang="en-US" sz="1300" dirty="0">
-                <a:solidFill>
                   <a:schemeClr val="tx1"/>
                 </a:solidFill>
               </a:rPr>
-              <a:t>Данные связаны: пользователь → планы → занятия. Нужны SQL-запросы и транзакции. Firebase требует облака</a:t>
-            </a:r>
-            <a:endParaRPr lang="en-US" sz="1300" dirty="0"/>
-          </a:p>
-        </p:txBody>
-      </p:sp>
-      <p:sp>
-        <p:nvSpPr>
-          <p:cNvPr id="22" name="Выбор Навигация"/>
+              <a:t>вместо Firebase: без облака и ключей, связи и SQL</a:t>
+            </a:r>
+            <a:endParaRPr lang="en-US" sz="1200" dirty="0"/>
+          </a:p>
+        </p:txBody>
+      </p:sp>
+      <p:sp>
+        <p:nvSpPr>
+          <p:cNvPr id="35" name="Выбор Навигация"/>
           <p:cNvSpPr/>
           <p:nvPr/>
         </p:nvSpPr>
         <p:spPr>
           <a:xfrm>
-            <a:off x="6035040" y="3749040"/>
-            <a:ext cx="5605272" cy="1051560"/>
+            <a:off x="6181344" y="4617720"/>
+            <a:ext cx="2633472" cy="1554480"/>
           </a:xfrm>
           <a:prstGeom prst="roundRect">
             <a:avLst>
-              <a:gd name="adj" fmla="val 10435"/>
+              <a:gd name="adj" fmla="val 7059"/>
             </a:avLst>
           </a:prstGeom>
           <a:solidFill>
             <a:schemeClr val="bg1"/>
           </a:solidFill>
-          <a:ln/>
-        </p:spPr>
-      </p:sp>
-      <p:sp>
-        <p:nvSpPr>
-          <p:cNvPr id="23" name="Рамка Навигация"/>
-          <p:cNvSpPr/>
-          <p:nvPr/>
-        </p:nvSpPr>
-        <p:spPr>
-          <a:xfrm>
-            <a:off x="6035040" y="3749040"/>
-            <a:ext cx="5605272" cy="1051560"/>
-          </a:xfrm>
-          <a:prstGeom prst="roundRect">
-            <a:avLst>
-              <a:gd name="adj" fmla="val 10435"/>
-            </a:avLst>
-          </a:prstGeom>
           <a:ln w="12700">
             <a:solidFill>
               <a:srgbClr val="D5DCEC"/>
@@ -6214,14 +6701,14 @@
       </p:sp>
       <p:sp>
         <p:nvSpPr>
-          <p:cNvPr id="24" name="Text 22"/>
+          <p:cNvPr id="36" name="Text 34"/>
           <p:cNvSpPr txBox="1"/>
           <p:nvPr/>
         </p:nvSpPr>
         <p:spPr>
           <a:xfrm>
-            <a:off x="6263640" y="3858768"/>
-            <a:ext cx="5212080" cy="320040"/>
+            <a:off x="6364224" y="4727448"/>
+            <a:ext cx="2286000" cy="274320"/>
           </a:xfrm>
           <a:prstGeom prst="rect">
             <a:avLst/>
@@ -6237,113 +6724,108 @@
               <a:buNone/>
             </a:pPr>
             <a:r>
-              <a:rPr lang="en-US" sz="1600" dirty="0">
+              <a:rPr lang="en-US" sz="1300" dirty="0">
                 <a:solidFill>
                   <a:schemeClr val="accent6"/>
                 </a:solidFill>
               </a:rPr>
-              <a:t>Навигация: </a:t>
-            </a:r>
+              <a:t>Навигация</a:t>
+            </a:r>
+            <a:endParaRPr lang="en-US" sz="1300" dirty="0"/>
+          </a:p>
+        </p:txBody>
+      </p:sp>
+      <p:sp>
+        <p:nvSpPr>
+          <p:cNvPr id="37" name="Text 35"/>
+          <p:cNvSpPr txBox="1"/>
+          <p:nvPr/>
+        </p:nvSpPr>
+        <p:spPr>
+          <a:xfrm>
+            <a:off x="6364224" y="5001768"/>
+            <a:ext cx="2286000" cy="365760"/>
+          </a:xfrm>
+          <a:prstGeom prst="rect">
+            <a:avLst/>
+          </a:prstGeom>
+          <a:noFill/>
+          <a:ln/>
+        </p:spPr>
+        <p:txBody>
+          <a:bodyPr wrap="square" lIns="0" tIns="0" rIns="0" bIns="0" rtlCol="0" anchor="t"/>
+          <a:lstStyle/>
+          <a:p>
             <a:pPr indent="0" marL="0">
               <a:buNone/>
             </a:pPr>
             <a:r>
-              <a:rPr lang="en-US" sz="1600" b="1" dirty="0">
+              <a:rPr lang="en-US" sz="1700" b="1" dirty="0">
                 <a:solidFill>
                   <a:schemeClr val="accent1"/>
                 </a:solidFill>
               </a:rPr>
               <a:t>go_router</a:t>
             </a:r>
+            <a:endParaRPr lang="en-US" sz="1700" dirty="0"/>
+          </a:p>
+        </p:txBody>
+      </p:sp>
+      <p:sp>
+        <p:nvSpPr>
+          <p:cNvPr id="38" name="Text 36"/>
+          <p:cNvSpPr txBox="1"/>
+          <p:nvPr/>
+        </p:nvSpPr>
+        <p:spPr>
+          <a:xfrm>
+            <a:off x="6364224" y="5394960"/>
+            <a:ext cx="2331720" cy="731520"/>
+          </a:xfrm>
+          <a:prstGeom prst="rect">
+            <a:avLst/>
+          </a:prstGeom>
+          <a:noFill/>
+          <a:ln/>
+        </p:spPr>
+        <p:txBody>
+          <a:bodyPr wrap="square" lIns="0" tIns="0" rIns="0" bIns="0" rtlCol="0" anchor="t"/>
+          <a:lstStyle/>
+          <a:p>
             <a:pPr indent="0" marL="0">
               <a:buNone/>
             </a:pPr>
             <a:r>
               <a:rPr lang="en-US" sz="1200" dirty="0">
                 <a:solidFill>
-                  <a:schemeClr val="accent6"/>
-                </a:solidFill>
-              </a:rPr>
-              <a:t>  вместо Navigator 1.0</a:t>
-            </a:r>
-            <a:endParaRPr lang="en-US" sz="1600" dirty="0"/>
-          </a:p>
-        </p:txBody>
-      </p:sp>
-      <p:sp>
-        <p:nvSpPr>
-          <p:cNvPr id="25" name="Text 23"/>
-          <p:cNvSpPr txBox="1"/>
-          <p:nvPr/>
-        </p:nvSpPr>
-        <p:spPr>
-          <a:xfrm>
-            <a:off x="6263640" y="4206240"/>
-            <a:ext cx="5212080" cy="548640"/>
-          </a:xfrm>
-          <a:prstGeom prst="rect">
-            <a:avLst/>
-          </a:prstGeom>
-          <a:noFill/>
-          <a:ln/>
-        </p:spPr>
-        <p:txBody>
-          <a:bodyPr wrap="square" lIns="0" tIns="0" rIns="0" bIns="0" rtlCol="0" anchor="t"/>
-          <a:lstStyle/>
-          <a:p>
-            <a:pPr indent="0" marL="0">
-              <a:buNone/>
-            </a:pPr>
-            <a:r>
-              <a:rPr lang="en-US" sz="1300" dirty="0">
-                <a:solidFill>
                   <a:schemeClr val="tx1"/>
                 </a:solidFill>
               </a:rPr>
-              <a:t>Декларативные маршруты, redirect закрывает экраны без входа</a:t>
-            </a:r>
-            <a:endParaRPr lang="en-US" sz="1300" dirty="0"/>
-          </a:p>
-        </p:txBody>
-      </p:sp>
-      <p:sp>
-        <p:nvSpPr>
-          <p:cNvPr id="26" name="Выбор Пароли"/>
+              <a:t>redirect закрывает экраны без входа</a:t>
+            </a:r>
+            <a:endParaRPr lang="en-US" sz="1200" dirty="0"/>
+          </a:p>
+        </p:txBody>
+      </p:sp>
+      <p:sp>
+        <p:nvSpPr>
+          <p:cNvPr id="39" name="Выбор Вход"/>
           <p:cNvSpPr/>
           <p:nvPr/>
         </p:nvSpPr>
         <p:spPr>
           <a:xfrm>
-            <a:off x="6035040" y="4937760"/>
-            <a:ext cx="5605272" cy="1051560"/>
+            <a:off x="8997696" y="4617720"/>
+            <a:ext cx="2633472" cy="1554480"/>
           </a:xfrm>
           <a:prstGeom prst="roundRect">
             <a:avLst>
-              <a:gd name="adj" fmla="val 10435"/>
+              <a:gd name="adj" fmla="val 7059"/>
             </a:avLst>
           </a:prstGeom>
           <a:solidFill>
             <a:schemeClr val="bg1"/>
           </a:solidFill>
-          <a:ln/>
-        </p:spPr>
-      </p:sp>
-      <p:sp>
-        <p:nvSpPr>
-          <p:cNvPr id="27" name="Рамка Пароли"/>
-          <p:cNvSpPr/>
-          <p:nvPr/>
-        </p:nvSpPr>
-        <p:spPr>
-          <a:xfrm>
-            <a:off x="6035040" y="4937760"/>
-            <a:ext cx="5605272" cy="1051560"/>
-          </a:xfrm>
-          <a:prstGeom prst="roundRect">
-            <a:avLst>
-              <a:gd name="adj" fmla="val 10435"/>
-            </a:avLst>
-          </a:prstGeom>
           <a:ln w="12700">
             <a:solidFill>
               <a:srgbClr val="D5DCEC"/>
@@ -6354,14 +6836,14 @@
       </p:sp>
       <p:sp>
         <p:nvSpPr>
-          <p:cNvPr id="28" name="Text 26"/>
+          <p:cNvPr id="40" name="Text 38"/>
           <p:cNvSpPr txBox="1"/>
           <p:nvPr/>
         </p:nvSpPr>
         <p:spPr>
           <a:xfrm>
-            <a:off x="6263640" y="5047488"/>
-            <a:ext cx="5212080" cy="320040"/>
+            <a:off x="9180576" y="4727448"/>
+            <a:ext cx="2286000" cy="274320"/>
           </a:xfrm>
           <a:prstGeom prst="rect">
             <a:avLst/>
@@ -6377,72 +6859,86 @@
               <a:buNone/>
             </a:pPr>
             <a:r>
-              <a:rPr lang="en-US" sz="1600" dirty="0">
+              <a:rPr lang="en-US" sz="1300" dirty="0">
                 <a:solidFill>
                   <a:schemeClr val="accent6"/>
                 </a:solidFill>
               </a:rPr>
-              <a:t>Пароли: </a:t>
-            </a:r>
+              <a:t>Вход</a:t>
+            </a:r>
+            <a:endParaRPr lang="en-US" sz="1300" dirty="0"/>
+          </a:p>
+        </p:txBody>
+      </p:sp>
+      <p:sp>
+        <p:nvSpPr>
+          <p:cNvPr id="41" name="Text 39"/>
+          <p:cNvSpPr txBox="1"/>
+          <p:nvPr/>
+        </p:nvSpPr>
+        <p:spPr>
+          <a:xfrm>
+            <a:off x="9180576" y="5001768"/>
+            <a:ext cx="2286000" cy="365760"/>
+          </a:xfrm>
+          <a:prstGeom prst="rect">
+            <a:avLst/>
+          </a:prstGeom>
+          <a:noFill/>
+          <a:ln/>
+        </p:spPr>
+        <p:txBody>
+          <a:bodyPr wrap="square" lIns="0" tIns="0" rIns="0" bIns="0" rtlCol="0" anchor="t"/>
+          <a:lstStyle/>
+          <a:p>
             <a:pPr indent="0" marL="0">
               <a:buNone/>
             </a:pPr>
             <a:r>
-              <a:rPr lang="en-US" sz="1600" b="1" dirty="0">
+              <a:rPr lang="en-US" sz="1700" b="1" dirty="0">
                 <a:solidFill>
                   <a:schemeClr val="accent1"/>
                 </a:solidFill>
               </a:rPr>
-              <a:t>PBKDF2 локально</a:t>
-            </a:r>
+              <a:t>PBKDF2 + токен</a:t>
+            </a:r>
+            <a:endParaRPr lang="en-US" sz="1700" dirty="0"/>
+          </a:p>
+        </p:txBody>
+      </p:sp>
+      <p:sp>
+        <p:nvSpPr>
+          <p:cNvPr id="42" name="Text 40"/>
+          <p:cNvSpPr txBox="1"/>
+          <p:nvPr/>
+        </p:nvSpPr>
+        <p:spPr>
+          <a:xfrm>
+            <a:off x="9180576" y="5394960"/>
+            <a:ext cx="2331720" cy="731520"/>
+          </a:xfrm>
+          <a:prstGeom prst="rect">
+            <a:avLst/>
+          </a:prstGeom>
+          <a:noFill/>
+          <a:ln/>
+        </p:spPr>
+        <p:txBody>
+          <a:bodyPr wrap="square" lIns="0" tIns="0" rIns="0" bIns="0" rtlCol="0" anchor="t"/>
+          <a:lstStyle/>
+          <a:p>
             <a:pPr indent="0" marL="0">
               <a:buNone/>
             </a:pPr>
             <a:r>
               <a:rPr lang="en-US" sz="1200" dirty="0">
                 <a:solidFill>
-                  <a:schemeClr val="accent6"/>
-                </a:solidFill>
-              </a:rPr>
-              <a:t>  вместо Firebase Auth</a:t>
-            </a:r>
-            <a:endParaRPr lang="en-US" sz="1600" dirty="0"/>
-          </a:p>
-        </p:txBody>
-      </p:sp>
-      <p:sp>
-        <p:nvSpPr>
-          <p:cNvPr id="29" name="Text 27"/>
-          <p:cNvSpPr txBox="1"/>
-          <p:nvPr/>
-        </p:nvSpPr>
-        <p:spPr>
-          <a:xfrm>
-            <a:off x="6263640" y="5394960"/>
-            <a:ext cx="5212080" cy="548640"/>
-          </a:xfrm>
-          <a:prstGeom prst="rect">
-            <a:avLst/>
-          </a:prstGeom>
-          <a:noFill/>
-          <a:ln/>
-        </p:spPr>
-        <p:txBody>
-          <a:bodyPr wrap="square" lIns="0" tIns="0" rIns="0" bIns="0" rtlCol="0" anchor="t"/>
-          <a:lstStyle/>
-          <a:p>
-            <a:pPr indent="0" marL="0">
-              <a:buNone/>
-            </a:pPr>
-            <a:r>
-              <a:rPr lang="en-US" sz="1300" dirty="0">
-                <a:solidFill>
                   <a:schemeClr val="tx1"/>
                 </a:solidFill>
               </a:rPr>
-              <a:t>Вход работает офлайн, пароль хранится только как хэш с солью</a:t>
-            </a:r>
-            <a:endParaRPr lang="en-US" sz="1300" dirty="0"/>
+              <a:t>вместо Firebase Auth: пароль только хэшем</a:t>
+            </a:r>
+            <a:endParaRPr lang="en-US" sz="1200" dirty="0"/>
           </a:p>
         </p:txBody>
       </p:sp>
@@ -9122,7 +9618,7 @@
                   <a:schemeClr val="tx1"/>
                 </a:solidFill>
               </a:rPr>
-              <a:t>Перепланирование, Pomodoro, CRUD, поиск, уведомления, графики</a:t>
+              <a:t>Сервер API, CRUD через API, перепланирование, Pomodoro, графики</a:t>
             </a:r>
             <a:endParaRPr lang="en-US" sz="1300" dirty="0"/>
           </a:p>
@@ -9268,7 +9764,7 @@
                   <a:schemeClr val="tx1"/>
                 </a:solidFill>
               </a:rPr>
-              <a:t>Тесты, релизный APK, практическая глава, итоговая защита</a:t>
+              <a:t>Тесты, APK и iPhone, практическая глава, итоговая защита</a:t>
             </a:r>
             <a:endParaRPr lang="en-US" sz="1300" dirty="0"/>
           </a:p>
@@ -9337,7 +9833,7 @@
                   <a:schemeClr val="accent4"/>
                 </a:solidFill>
               </a:rPr>
-              <a:t>Работает офлайн, запускается командой flutter run. Спасибо за внимание!</a:t>
+              <a:t>Данные на своём сервере API, без облака и ключей. Спасибо за внимание!</a:t>
             </a:r>
             <a:endParaRPr lang="en-US" sz="1800" dirty="0"/>
           </a:p>
